--- a/Programação de aplicativos/8 - OOP com PHP.pptx
+++ b/Programação de aplicativos/8 - OOP com PHP.pptx
@@ -25316,7 +25316,7 @@
         </p:nvSpPr>
         <p:spPr>
           <a:xfrm>
-            <a:off x="3172968" y="1005840"/>
+            <a:off x="3172968" y="1016350"/>
             <a:ext cx="2743200" cy="2743200"/>
           </a:xfrm>
           <a:prstGeom prst="rect">
